--- a/docs/naluka-pitch.pptx
+++ b/docs/naluka-pitch.pptx
@@ -1827,7 +1827,7 @@
         <p:spPr>
           <a:xfrm>
             <a:off x="548640" y="1143000"/>
-            <a:ext cx="5486400" cy="274320"/>
+            <a:ext cx="7772400" cy="274320"/>
           </a:xfrm>
           <a:prstGeom prst="rect">
             <a:avLst/>
@@ -4926,45 +4926,6 @@
       <p:sp>
         <p:nvSpPr>
           <p:cNvPr id="17" name="Text 15"/>
-          <p:cNvSpPr/>
-          <p:nvPr/>
-        </p:nvSpPr>
-        <p:spPr>
-          <a:xfrm>
-            <a:off x="457200" y="4686300"/>
-            <a:ext cx="8229600" cy="274320"/>
-          </a:xfrm>
-          <a:prstGeom prst="rect">
-            <a:avLst/>
-          </a:prstGeom>
-          <a:noFill/>
-          <a:ln/>
-        </p:spPr>
-        <p:txBody>
-          <a:bodyPr wrap="square" lIns="0" tIns="0" rIns="0" bIns="0" rtlCol="0" anchor="ctr"/>
-          <a:lstStyle/>
-          <a:p>
-            <a:pPr indent="0" marL="0">
-              <a:buNone/>
-            </a:pPr>
-            <a:r>
-              <a:rPr lang="en-US" sz="900" i="1" dirty="0">
-                <a:solidFill>
-                  <a:srgbClr val="BFBEAB"/>
-                </a:solidFill>
-                <a:latin typeface="Calibri" pitchFamily="34" charset="0"/>
-                <a:ea typeface="Calibri" pitchFamily="34" charset="-122"/>
-                <a:cs typeface="Calibri" pitchFamily="34" charset="-120"/>
-              </a:rPr>
-              <a:t>(Stats illustrative — replace with current SACAA report numbers before each call.)</a:t>
-            </a:r>
-            <a:endParaRPr lang="en-US" sz="900" dirty="0"/>
-          </a:p>
-        </p:txBody>
-      </p:sp>
-      <p:sp>
-        <p:nvSpPr>
-          <p:cNvPr id="18" name="Text 16"/>
           <p:cNvSpPr/>
           <p:nvPr/>
         </p:nvSpPr>
@@ -6341,7 +6302,7 @@
                 <a:ea typeface="Calibri" pitchFamily="34" charset="-122"/>
                 <a:cs typeface="Calibri" pitchFamily="34" charset="-120"/>
               </a:rPr>
-              <a:t>Sign up your team</a:t>
+              <a:t>Sign up team</a:t>
             </a:r>
             <a:endParaRPr lang="en-US" sz="1200" dirty="0"/>
           </a:p>
@@ -6503,7 +6464,7 @@
                 <a:ea typeface="Calibri" pitchFamily="34" charset="-122"/>
                 <a:cs typeface="Calibri" pitchFamily="34" charset="-120"/>
               </a:rPr>
-              <a:t>We verify each member</a:t>
+              <a:t>Verify</a:t>
             </a:r>
             <a:endParaRPr lang="en-US" sz="1200" dirty="0"/>
           </a:p>
@@ -6542,7 +6503,7 @@
                 <a:ea typeface="Calibri" pitchFamily="34" charset="-122"/>
                 <a:cs typeface="Calibri" pitchFamily="34" charset="-120"/>
               </a:rPr>
-              <a:t>Manual verification within 4 business hours. Once verified, listed and bookable.</a:t>
+              <a:t>Manual SACAA cross-check within 4 business hours. Verified = listed + bookable.</a:t>
             </a:r>
             <a:endParaRPr lang="en-US" sz="1000" dirty="0"/>
           </a:p>
@@ -8034,8 +7995,8 @@
         </p:nvSpPr>
         <p:spPr>
           <a:xfrm>
-            <a:off x="457200" y="1783080"/>
-            <a:ext cx="2697480" cy="2743200"/>
+            <a:off x="457200" y="2057400"/>
+            <a:ext cx="2697480" cy="2697480"/>
           </a:xfrm>
           <a:prstGeom prst="rect">
             <a:avLst/>
@@ -8059,7 +8020,7 @@
         </p:nvSpPr>
         <p:spPr>
           <a:xfrm>
-            <a:off x="640080" y="1920240"/>
+            <a:off x="640080" y="2194560"/>
             <a:ext cx="2331720" cy="274320"/>
           </a:xfrm>
           <a:prstGeom prst="rect">
@@ -8098,7 +8059,7 @@
         </p:nvSpPr>
         <p:spPr>
           <a:xfrm>
-            <a:off x="640080" y="2148840"/>
+            <a:off x="640080" y="2423160"/>
             <a:ext cx="2331720" cy="274320"/>
           </a:xfrm>
           <a:prstGeom prst="rect">
@@ -8137,7 +8098,7 @@
         </p:nvSpPr>
         <p:spPr>
           <a:xfrm>
-            <a:off x="640080" y="2468880"/>
+            <a:off x="640080" y="2743200"/>
             <a:ext cx="2331720" cy="548640"/>
           </a:xfrm>
           <a:prstGeom prst="rect">
@@ -8176,7 +8137,7 @@
         </p:nvSpPr>
         <p:spPr>
           <a:xfrm>
-            <a:off x="640080" y="3017520"/>
+            <a:off x="640080" y="3291840"/>
             <a:ext cx="2331720" cy="274320"/>
           </a:xfrm>
           <a:prstGeom prst="rect">
@@ -8215,8 +8176,8 @@
         </p:nvSpPr>
         <p:spPr>
           <a:xfrm>
-            <a:off x="640080" y="3337560"/>
-            <a:ext cx="2331720" cy="1051560"/>
+            <a:off x="640080" y="3611880"/>
+            <a:ext cx="2331720" cy="1005840"/>
           </a:xfrm>
           <a:prstGeom prst="rect">
             <a:avLst/>
@@ -8321,8 +8282,8 @@
         </p:nvSpPr>
         <p:spPr>
           <a:xfrm>
-            <a:off x="3246120" y="1783080"/>
-            <a:ext cx="2697480" cy="2743200"/>
+            <a:off x="3246120" y="2057400"/>
+            <a:ext cx="2697480" cy="2697480"/>
           </a:xfrm>
           <a:prstGeom prst="rect">
             <a:avLst/>
@@ -8346,7 +8307,7 @@
         </p:nvSpPr>
         <p:spPr>
           <a:xfrm>
-            <a:off x="3246120" y="1618488"/>
+            <a:off x="3246120" y="1691640"/>
             <a:ext cx="2697480" cy="274320"/>
           </a:xfrm>
           <a:prstGeom prst="rect">
@@ -8363,7 +8324,7 @@
               <a:buNone/>
             </a:pPr>
             <a:r>
-              <a:rPr lang="en-US" sz="900" b="1" spc="300" kern="0" dirty="0">
+              <a:rPr lang="en-US" sz="1000" b="1" spc="400" kern="0" dirty="0">
                 <a:solidFill>
                   <a:srgbClr val="D4A934"/>
                 </a:solidFill>
@@ -8373,7 +8334,7 @@
               </a:rPr>
               <a:t>MOST POPULAR</a:t>
             </a:r>
-            <a:endParaRPr lang="en-US" sz="900" dirty="0"/>
+            <a:endParaRPr lang="en-US" sz="1000" dirty="0"/>
           </a:p>
         </p:txBody>
       </p:sp>
@@ -8385,7 +8346,7 @@
         </p:nvSpPr>
         <p:spPr>
           <a:xfrm>
-            <a:off x="3429000" y="1920240"/>
+            <a:off x="3429000" y="2194560"/>
             <a:ext cx="2331720" cy="274320"/>
           </a:xfrm>
           <a:prstGeom prst="rect">
@@ -8424,7 +8385,7 @@
         </p:nvSpPr>
         <p:spPr>
           <a:xfrm>
-            <a:off x="3429000" y="2148840"/>
+            <a:off x="3429000" y="2423160"/>
             <a:ext cx="2331720" cy="274320"/>
           </a:xfrm>
           <a:prstGeom prst="rect">
@@ -8463,7 +8424,7 @@
         </p:nvSpPr>
         <p:spPr>
           <a:xfrm>
-            <a:off x="3429000" y="2468880"/>
+            <a:off x="3429000" y="2743200"/>
             <a:ext cx="2331720" cy="548640"/>
           </a:xfrm>
           <a:prstGeom prst="rect">
@@ -8502,7 +8463,7 @@
         </p:nvSpPr>
         <p:spPr>
           <a:xfrm>
-            <a:off x="3429000" y="3017520"/>
+            <a:off x="3429000" y="3291840"/>
             <a:ext cx="2331720" cy="274320"/>
           </a:xfrm>
           <a:prstGeom prst="rect">
@@ -8541,8 +8502,8 @@
         </p:nvSpPr>
         <p:spPr>
           <a:xfrm>
-            <a:off x="3429000" y="3337560"/>
-            <a:ext cx="2331720" cy="1051560"/>
+            <a:off x="3429000" y="3611880"/>
+            <a:ext cx="2331720" cy="1005840"/>
           </a:xfrm>
           <a:prstGeom prst="rect">
             <a:avLst/>
@@ -8647,8 +8608,8 @@
         </p:nvSpPr>
         <p:spPr>
           <a:xfrm>
-            <a:off x="6035040" y="1783080"/>
-            <a:ext cx="2697480" cy="2743200"/>
+            <a:off x="6035040" y="2057400"/>
+            <a:ext cx="2697480" cy="2697480"/>
           </a:xfrm>
           <a:prstGeom prst="rect">
             <a:avLst/>
@@ -8672,7 +8633,7 @@
         </p:nvSpPr>
         <p:spPr>
           <a:xfrm>
-            <a:off x="6217920" y="1920240"/>
+            <a:off x="6217920" y="2194560"/>
             <a:ext cx="2331720" cy="274320"/>
           </a:xfrm>
           <a:prstGeom prst="rect">
@@ -8711,7 +8672,7 @@
         </p:nvSpPr>
         <p:spPr>
           <a:xfrm>
-            <a:off x="6217920" y="2148840"/>
+            <a:off x="6217920" y="2423160"/>
             <a:ext cx="2331720" cy="274320"/>
           </a:xfrm>
           <a:prstGeom prst="rect">
@@ -8750,7 +8711,7 @@
         </p:nvSpPr>
         <p:spPr>
           <a:xfrm>
-            <a:off x="6217920" y="2468880"/>
+            <a:off x="6217920" y="2743200"/>
             <a:ext cx="2331720" cy="548640"/>
           </a:xfrm>
           <a:prstGeom prst="rect">
@@ -8789,7 +8750,7 @@
         </p:nvSpPr>
         <p:spPr>
           <a:xfrm>
-            <a:off x="6217920" y="3017520"/>
+            <a:off x="6217920" y="3291840"/>
             <a:ext cx="2331720" cy="274320"/>
           </a:xfrm>
           <a:prstGeom prst="rect">
@@ -8828,8 +8789,8 @@
         </p:nvSpPr>
         <p:spPr>
           <a:xfrm>
-            <a:off x="6217920" y="3337560"/>
-            <a:ext cx="2331720" cy="1051560"/>
+            <a:off x="6217920" y="3611880"/>
+            <a:ext cx="2331720" cy="1005840"/>
           </a:xfrm>
           <a:prstGeom prst="rect">
             <a:avLst/>
